--- a/oi-framework/nsf/NSF-Quantum-Algorithms-Challenge_Delivery-Playbook-INTERNAL.pptx
+++ b/oi-framework/nsf/NSF-Quantum-Algorithms-Challenge_Delivery-Playbook-INTERNAL.pptx
@@ -119,19 +119,19 @@
   <p:extLst>
     <p:ext uri="{521415D9-36F7-43E2-AB2F-B90AF26B5E84}">
       <p14:sectionLst xmlns:p14="http://schemas.microsoft.com/office/powerpoint/2010/main">
-        <p14:section name="Overview" id="{257fb3a1-9f9f-2442-e632-0971cfc2d7eb}">
+        <p14:section name="Overview" id="{7e5f5dcd-03d6-abac-08cc-30f72ad86498}">
           <p14:sldIdLst>
             <p14:sldId id="256"/>
             <p14:sldId id="257"/>
           </p14:sldIdLst>
         </p14:section>
-        <p14:section name="Traceability" id="{e411736e-71e4-7e86-5247-09e2f914f95a}">
+        <p14:section name="Traceability" id="{1647f094-0d62-8528-cdd2-467248b8fe1d}">
           <p14:sldIdLst>
             <p14:sldId id="258"/>
             <p14:sldId id="259"/>
           </p14:sldIdLst>
         </p14:section>
-        <p14:section name="Tools applied" id="{8217fb3b-9cdb-2ad6-85ae-4a2ad25b411f}">
+        <p14:section name="Tools applied" id="{cb0bcb60-c646-d48b-8c86-650a66ae2548}">
           <p14:sldIdLst>
             <p14:sldId id="260"/>
             <p14:sldId id="261"/>
@@ -139,13 +139,13 @@
             <p14:sldId id="263"/>
           </p14:sldIdLst>
         </p14:section>
-        <p14:section name="Risks and KPIs" id="{d287930d-3a03-e242-ec05-38a5c64e37d5}">
+        <p14:section name="Risks and KPIs" id="{f3052eec-ebf0-f29a-045a-1a4936225b2e}">
           <p14:sldIdLst>
             <p14:sldId id="264"/>
             <p14:sldId id="265"/>
           </p14:sldIdLst>
         </p14:section>
-        <p14:section name="Next week" id="{3a7fcd11-e9e7-02db-0294-d6a0defab043}">
+        <p14:section name="Next week" id="{db08ca84-61e9-3086-003f-26c8d3025b3b}">
           <p14:sldIdLst>
             <p14:sldId id="266"/>
             <p14:sldId id="267"/>
@@ -5785,7 +5785,7 @@
                             <a:schemeClr val="tx1"/>
                           </a:solidFill>
                         </a:rPr>
-                        <a:t>65–80</a:t>
+                        <a:t>65–75</a:t>
                       </a:r>
                       <a:endParaRPr lang="en-US" sz="1450" dirty="0"/>
                     </a:p>
@@ -5846,7 +5846,7 @@
                             <a:schemeClr val="tx1"/>
                           </a:solidFill>
                         </a:rPr>
-                        <a:t>42–52</a:t>
+                        <a:t>42–48</a:t>
                       </a:r>
                       <a:endParaRPr lang="en-US" sz="1450" dirty="0"/>
                     </a:p>
@@ -6092,7 +6092,7 @@
                             <a:schemeClr val="tx1"/>
                           </a:solidFill>
                         </a:rPr>
-                        <a:t>80–90</a:t>
+                        <a:t>75–82</a:t>
                       </a:r>
                       <a:endParaRPr lang="en-US" sz="1450" dirty="0"/>
                     </a:p>
@@ -6153,7 +6153,7 @@
                             <a:schemeClr val="tx1"/>
                           </a:solidFill>
                         </a:rPr>
-                        <a:t>52–60</a:t>
+                        <a:t>48–53</a:t>
                       </a:r>
                       <a:endParaRPr lang="en-US" sz="1450" dirty="0"/>
                     </a:p>
@@ -6214,6 +6214,313 @@
                             <a:schemeClr val="tx1"/>
                           </a:solidFill>
                         </a:rPr>
+                        <a:t>Logframe and riskiest assumptions</a:t>
+                      </a:r>
+                      <a:endParaRPr lang="en-US" sz="1450" dirty="0"/>
+                    </a:p>
+                  </a:txBody>
+                  <a:tcPr marL="76200" marR="76200" marT="50800" marB="50800" anchor="t">
+                    <a:lnL w="6350" cap="flat" cmpd="sng" algn="ctr">
+                      <a:solidFill>
+                        <a:srgbClr val="BFE0D8"/>
+                      </a:solidFill>
+                      <a:prstDash val="solid"/>
+                      <a:round/>
+                      <a:headEnd type="none" w="med" len="med"/>
+                      <a:tailEnd type="none" w="med" len="med"/>
+                    </a:lnL>
+                    <a:lnR w="6350" cap="flat" cmpd="sng" algn="ctr">
+                      <a:solidFill>
+                        <a:srgbClr val="BFE0D8"/>
+                      </a:solidFill>
+                      <a:prstDash val="solid"/>
+                      <a:round/>
+                      <a:headEnd type="none" w="med" len="med"/>
+                      <a:tailEnd type="none" w="med" len="med"/>
+                    </a:lnR>
+                    <a:lnT w="6350" cap="flat" cmpd="sng" algn="ctr">
+                      <a:solidFill>
+                        <a:srgbClr val="BFE0D8"/>
+                      </a:solidFill>
+                      <a:prstDash val="solid"/>
+                      <a:round/>
+                      <a:headEnd type="none" w="med" len="med"/>
+                      <a:tailEnd type="none" w="med" len="med"/>
+                    </a:lnT>
+                    <a:lnB w="6350" cap="flat" cmpd="sng" algn="ctr">
+                      <a:solidFill>
+                        <a:srgbClr val="BFE0D8"/>
+                      </a:solidFill>
+                      <a:prstDash val="solid"/>
+                      <a:round/>
+                      <a:headEnd type="none" w="med" len="med"/>
+                      <a:tailEnd type="none" w="med" len="med"/>
+                    </a:lnB>
+                    <a:solidFill>
+                      <a:schemeClr val="bg1"/>
+                    </a:solidFill>
+                  </a:tcPr>
+                </a:tc>
+                <a:tc>
+                  <a:txBody>
+                    <a:bodyPr/>
+                    <a:lstStyle/>
+                    <a:p>
+                      <a:pPr indent="0" marL="0">
+                        <a:buNone/>
+                      </a:pPr>
+                      <a:r>
+                        <a:rPr lang="en-US" sz="1450" dirty="0">
+                          <a:solidFill>
+                            <a:schemeClr val="tx1"/>
+                          </a:solidFill>
+                        </a:rPr>
+                        <a:t>Point only to the assumptions column; ask the room which risk worries them most</a:t>
+                      </a:r>
+                      <a:endParaRPr lang="en-US" sz="1450" dirty="0"/>
+                    </a:p>
+                  </a:txBody>
+                  <a:tcPr marL="76200" marR="76200" marT="50800" marB="50800" anchor="t">
+                    <a:lnL w="6350" cap="flat" cmpd="sng" algn="ctr">
+                      <a:solidFill>
+                        <a:srgbClr val="BFE0D8"/>
+                      </a:solidFill>
+                      <a:prstDash val="solid"/>
+                      <a:round/>
+                      <a:headEnd type="none" w="med" len="med"/>
+                      <a:tailEnd type="none" w="med" len="med"/>
+                    </a:lnL>
+                    <a:lnR w="6350" cap="flat" cmpd="sng" algn="ctr">
+                      <a:solidFill>
+                        <a:srgbClr val="BFE0D8"/>
+                      </a:solidFill>
+                      <a:prstDash val="solid"/>
+                      <a:round/>
+                      <a:headEnd type="none" w="med" len="med"/>
+                      <a:tailEnd type="none" w="med" len="med"/>
+                    </a:lnR>
+                    <a:lnT w="6350" cap="flat" cmpd="sng" algn="ctr">
+                      <a:solidFill>
+                        <a:srgbClr val="BFE0D8"/>
+                      </a:solidFill>
+                      <a:prstDash val="solid"/>
+                      <a:round/>
+                      <a:headEnd type="none" w="med" len="med"/>
+                      <a:tailEnd type="none" w="med" len="med"/>
+                    </a:lnT>
+                    <a:lnB w="6350" cap="flat" cmpd="sng" algn="ctr">
+                      <a:solidFill>
+                        <a:srgbClr val="BFE0D8"/>
+                      </a:solidFill>
+                      <a:prstDash val="solid"/>
+                      <a:round/>
+                      <a:headEnd type="none" w="med" len="med"/>
+                      <a:tailEnd type="none" w="med" len="med"/>
+                    </a:lnB>
+                    <a:solidFill>
+                      <a:schemeClr val="bg1"/>
+                    </a:solidFill>
+                  </a:tcPr>
+                </a:tc>
+                <a:tc>
+                  <a:txBody>
+                    <a:bodyPr/>
+                    <a:lstStyle/>
+                    <a:p>
+                      <a:pPr indent="0" marL="0">
+                        <a:buNone/>
+                      </a:pPr>
+                      <a:r>
+                        <a:rPr lang="en-US" sz="1450" dirty="0">
+                          <a:solidFill>
+                            <a:schemeClr val="tx1"/>
+                          </a:solidFill>
+                        </a:rPr>
+                        <a:t>13–14</a:t>
+                      </a:r>
+                      <a:endParaRPr lang="en-US" sz="1450" dirty="0"/>
+                    </a:p>
+                  </a:txBody>
+                  <a:tcPr marL="76200" marR="76200" marT="50800" marB="50800" anchor="t">
+                    <a:lnL w="6350" cap="flat" cmpd="sng" algn="ctr">
+                      <a:solidFill>
+                        <a:srgbClr val="BFE0D8"/>
+                      </a:solidFill>
+                      <a:prstDash val="solid"/>
+                      <a:round/>
+                      <a:headEnd type="none" w="med" len="med"/>
+                      <a:tailEnd type="none" w="med" len="med"/>
+                    </a:lnL>
+                    <a:lnR w="6350" cap="flat" cmpd="sng" algn="ctr">
+                      <a:solidFill>
+                        <a:srgbClr val="BFE0D8"/>
+                      </a:solidFill>
+                      <a:prstDash val="solid"/>
+                      <a:round/>
+                      <a:headEnd type="none" w="med" len="med"/>
+                      <a:tailEnd type="none" w="med" len="med"/>
+                    </a:lnR>
+                    <a:lnT w="6350" cap="flat" cmpd="sng" algn="ctr">
+                      <a:solidFill>
+                        <a:srgbClr val="BFE0D8"/>
+                      </a:solidFill>
+                      <a:prstDash val="solid"/>
+                      <a:round/>
+                      <a:headEnd type="none" w="med" len="med"/>
+                      <a:tailEnd type="none" w="med" len="med"/>
+                    </a:lnT>
+                    <a:lnB w="6350" cap="flat" cmpd="sng" algn="ctr">
+                      <a:solidFill>
+                        <a:srgbClr val="BFE0D8"/>
+                      </a:solidFill>
+                      <a:prstDash val="solid"/>
+                      <a:round/>
+                      <a:headEnd type="none" w="med" len="med"/>
+                      <a:tailEnd type="none" w="med" len="med"/>
+                    </a:lnB>
+                    <a:solidFill>
+                      <a:schemeClr val="bg1"/>
+                    </a:solidFill>
+                  </a:tcPr>
+                </a:tc>
+              </a:tr>
+              <a:tr h="0">
+                <a:tc>
+                  <a:txBody>
+                    <a:bodyPr/>
+                    <a:lstStyle/>
+                    <a:p>
+                      <a:pPr indent="0" marL="0">
+                        <a:buNone/>
+                      </a:pPr>
+                      <a:r>
+                        <a:rPr lang="en-US" sz="1450" dirty="0">
+                          <a:solidFill>
+                            <a:schemeClr val="tx1"/>
+                          </a:solidFill>
+                        </a:rPr>
+                        <a:t>82–90</a:t>
+                      </a:r>
+                      <a:endParaRPr lang="en-US" sz="1450" dirty="0"/>
+                    </a:p>
+                  </a:txBody>
+                  <a:tcPr marL="76200" marR="76200" marT="50800" marB="50800" anchor="t">
+                    <a:lnL w="6350" cap="flat" cmpd="sng" algn="ctr">
+                      <a:solidFill>
+                        <a:srgbClr val="BFE0D8"/>
+                      </a:solidFill>
+                      <a:prstDash val="solid"/>
+                      <a:round/>
+                      <a:headEnd type="none" w="med" len="med"/>
+                      <a:tailEnd type="none" w="med" len="med"/>
+                    </a:lnL>
+                    <a:lnR w="6350" cap="flat" cmpd="sng" algn="ctr">
+                      <a:solidFill>
+                        <a:srgbClr val="BFE0D8"/>
+                      </a:solidFill>
+                      <a:prstDash val="solid"/>
+                      <a:round/>
+                      <a:headEnd type="none" w="med" len="med"/>
+                      <a:tailEnd type="none" w="med" len="med"/>
+                    </a:lnR>
+                    <a:lnT w="6350" cap="flat" cmpd="sng" algn="ctr">
+                      <a:solidFill>
+                        <a:srgbClr val="BFE0D8"/>
+                      </a:solidFill>
+                      <a:prstDash val="solid"/>
+                      <a:round/>
+                      <a:headEnd type="none" w="med" len="med"/>
+                      <a:tailEnd type="none" w="med" len="med"/>
+                    </a:lnT>
+                    <a:lnB w="6350" cap="flat" cmpd="sng" algn="ctr">
+                      <a:solidFill>
+                        <a:srgbClr val="BFE0D8"/>
+                      </a:solidFill>
+                      <a:prstDash val="solid"/>
+                      <a:round/>
+                      <a:headEnd type="none" w="med" len="med"/>
+                      <a:tailEnd type="none" w="med" len="med"/>
+                    </a:lnB>
+                    <a:solidFill>
+                      <a:schemeClr val="bg2"/>
+                    </a:solidFill>
+                  </a:tcPr>
+                </a:tc>
+                <a:tc>
+                  <a:txBody>
+                    <a:bodyPr/>
+                    <a:lstStyle/>
+                    <a:p>
+                      <a:pPr indent="0" marL="0">
+                        <a:buNone/>
+                      </a:pPr>
+                      <a:r>
+                        <a:rPr lang="en-US" sz="1450" dirty="0">
+                          <a:solidFill>
+                            <a:schemeClr val="tx1"/>
+                          </a:solidFill>
+                        </a:rPr>
+                        <a:t>53–60</a:t>
+                      </a:r>
+                      <a:endParaRPr lang="en-US" sz="1450" dirty="0"/>
+                    </a:p>
+                  </a:txBody>
+                  <a:tcPr marL="76200" marR="76200" marT="50800" marB="50800" anchor="t">
+                    <a:lnL w="6350" cap="flat" cmpd="sng" algn="ctr">
+                      <a:solidFill>
+                        <a:srgbClr val="BFE0D8"/>
+                      </a:solidFill>
+                      <a:prstDash val="solid"/>
+                      <a:round/>
+                      <a:headEnd type="none" w="med" len="med"/>
+                      <a:tailEnd type="none" w="med" len="med"/>
+                    </a:lnL>
+                    <a:lnR w="6350" cap="flat" cmpd="sng" algn="ctr">
+                      <a:solidFill>
+                        <a:srgbClr val="BFE0D8"/>
+                      </a:solidFill>
+                      <a:prstDash val="solid"/>
+                      <a:round/>
+                      <a:headEnd type="none" w="med" len="med"/>
+                      <a:tailEnd type="none" w="med" len="med"/>
+                    </a:lnR>
+                    <a:lnT w="6350" cap="flat" cmpd="sng" algn="ctr">
+                      <a:solidFill>
+                        <a:srgbClr val="BFE0D8"/>
+                      </a:solidFill>
+                      <a:prstDash val="solid"/>
+                      <a:round/>
+                      <a:headEnd type="none" w="med" len="med"/>
+                      <a:tailEnd type="none" w="med" len="med"/>
+                    </a:lnT>
+                    <a:lnB w="6350" cap="flat" cmpd="sng" algn="ctr">
+                      <a:solidFill>
+                        <a:srgbClr val="BFE0D8"/>
+                      </a:solidFill>
+                      <a:prstDash val="solid"/>
+                      <a:round/>
+                      <a:headEnd type="none" w="med" len="med"/>
+                      <a:tailEnd type="none" w="med" len="med"/>
+                    </a:lnB>
+                    <a:solidFill>
+                      <a:schemeClr val="bg2"/>
+                    </a:solidFill>
+                  </a:tcPr>
+                </a:tc>
+                <a:tc>
+                  <a:txBody>
+                    <a:bodyPr/>
+                    <a:lstStyle/>
+                    <a:p>
+                      <a:pPr indent="0" marL="0">
+                        <a:buNone/>
+                      </a:pPr>
+                      <a:r>
+                        <a:rPr lang="en-US" sz="1450" dirty="0">
+                          <a:solidFill>
+                            <a:schemeClr val="tx1"/>
+                          </a:solidFill>
+                        </a:rPr>
                         <a:t>Asks, decisions, next 90 days</a:t>
                       </a:r>
                       <a:endParaRPr lang="en-US" sz="1450" dirty="0"/>
@@ -6257,7 +6564,7 @@
                       <a:tailEnd type="none" w="med" len="med"/>
                     </a:lnB>
                     <a:solidFill>
-                      <a:schemeClr val="bg1"/>
+                      <a:schemeClr val="bg2"/>
                     </a:solidFill>
                   </a:tcPr>
                 </a:tc>
@@ -6318,7 +6625,7 @@
                       <a:tailEnd type="none" w="med" len="med"/>
                     </a:lnB>
                     <a:solidFill>
-                      <a:schemeClr val="bg1"/>
+                      <a:schemeClr val="bg2"/>
                     </a:solidFill>
                   </a:tcPr>
                 </a:tc>
@@ -6336,7 +6643,7 @@
                             <a:schemeClr val="tx1"/>
                           </a:solidFill>
                         </a:rPr>
-                        <a:t>13–15</a:t>
+                        <a:t>15–17</a:t>
                       </a:r>
                       <a:endParaRPr lang="en-US" sz="1450" dirty="0"/>
                     </a:p>
@@ -6379,7 +6686,7 @@
                       <a:tailEnd type="none" w="med" len="med"/>
                     </a:lnB>
                     <a:solidFill>
-                      <a:schemeClr val="bg1"/>
+                      <a:schemeClr val="bg2"/>
                     </a:solidFill>
                   </a:tcPr>
                 </a:tc>
